--- a/resources/DataProcessingDocumentation.pptx
+++ b/resources/DataProcessingDocumentation.pptx
@@ -230,7 +230,7 @@
           <a:p>
             <a:fld id="{A0EDB7BB-2F45-498B-BAA5-C7C8A1082E91}" type="datetimeFigureOut">
               <a:rPr lang="en-US" smtClean="0"/>
-              <a:t>12/17/2025</a:t>
+              <a:t>1/18/2026</a:t>
             </a:fld>
             <a:endParaRPr lang="en-US"/>
           </a:p>
@@ -1088,7 +1088,7 @@
           <a:p>
             <a:fld id="{1B31CA29-C2EB-451B-A0BB-9B4644E6EA20}" type="datetimeFigureOut">
               <a:rPr lang="en-US" smtClean="0"/>
-              <a:t>12/17/2025</a:t>
+              <a:t>1/18/2026</a:t>
             </a:fld>
             <a:endParaRPr lang="en-US"/>
           </a:p>
@@ -1286,7 +1286,7 @@
           <a:p>
             <a:fld id="{1B31CA29-C2EB-451B-A0BB-9B4644E6EA20}" type="datetimeFigureOut">
               <a:rPr lang="en-US" smtClean="0"/>
-              <a:t>12/17/2025</a:t>
+              <a:t>1/18/2026</a:t>
             </a:fld>
             <a:endParaRPr lang="en-US"/>
           </a:p>
@@ -1494,7 +1494,7 @@
           <a:p>
             <a:fld id="{1B31CA29-C2EB-451B-A0BB-9B4644E6EA20}" type="datetimeFigureOut">
               <a:rPr lang="en-US" smtClean="0"/>
-              <a:t>12/17/2025</a:t>
+              <a:t>1/18/2026</a:t>
             </a:fld>
             <a:endParaRPr lang="en-US"/>
           </a:p>
@@ -1692,7 +1692,7 @@
           <a:p>
             <a:fld id="{1B31CA29-C2EB-451B-A0BB-9B4644E6EA20}" type="datetimeFigureOut">
               <a:rPr lang="en-US" smtClean="0"/>
-              <a:t>12/17/2025</a:t>
+              <a:t>1/18/2026</a:t>
             </a:fld>
             <a:endParaRPr lang="en-US"/>
           </a:p>
@@ -1967,7 +1967,7 @@
           <a:p>
             <a:fld id="{1B31CA29-C2EB-451B-A0BB-9B4644E6EA20}" type="datetimeFigureOut">
               <a:rPr lang="en-US" smtClean="0"/>
-              <a:t>12/17/2025</a:t>
+              <a:t>1/18/2026</a:t>
             </a:fld>
             <a:endParaRPr lang="en-US"/>
           </a:p>
@@ -2232,7 +2232,7 @@
           <a:p>
             <a:fld id="{1B31CA29-C2EB-451B-A0BB-9B4644E6EA20}" type="datetimeFigureOut">
               <a:rPr lang="en-US" smtClean="0"/>
-              <a:t>12/17/2025</a:t>
+              <a:t>1/18/2026</a:t>
             </a:fld>
             <a:endParaRPr lang="en-US"/>
           </a:p>
@@ -2644,7 +2644,7 @@
           <a:p>
             <a:fld id="{1B31CA29-C2EB-451B-A0BB-9B4644E6EA20}" type="datetimeFigureOut">
               <a:rPr lang="en-US" smtClean="0"/>
-              <a:t>12/17/2025</a:t>
+              <a:t>1/18/2026</a:t>
             </a:fld>
             <a:endParaRPr lang="en-US"/>
           </a:p>
@@ -2785,7 +2785,7 @@
           <a:p>
             <a:fld id="{1B31CA29-C2EB-451B-A0BB-9B4644E6EA20}" type="datetimeFigureOut">
               <a:rPr lang="en-US" smtClean="0"/>
-              <a:t>12/17/2025</a:t>
+              <a:t>1/18/2026</a:t>
             </a:fld>
             <a:endParaRPr lang="en-US"/>
           </a:p>
@@ -2898,7 +2898,7 @@
           <a:p>
             <a:fld id="{1B31CA29-C2EB-451B-A0BB-9B4644E6EA20}" type="datetimeFigureOut">
               <a:rPr lang="en-US" smtClean="0"/>
-              <a:t>12/17/2025</a:t>
+              <a:t>1/18/2026</a:t>
             </a:fld>
             <a:endParaRPr lang="en-US"/>
           </a:p>
@@ -3209,7 +3209,7 @@
           <a:p>
             <a:fld id="{1B31CA29-C2EB-451B-A0BB-9B4644E6EA20}" type="datetimeFigureOut">
               <a:rPr lang="en-US" smtClean="0"/>
-              <a:t>12/17/2025</a:t>
+              <a:t>1/18/2026</a:t>
             </a:fld>
             <a:endParaRPr lang="en-US"/>
           </a:p>
@@ -3497,7 +3497,7 @@
           <a:p>
             <a:fld id="{1B31CA29-C2EB-451B-A0BB-9B4644E6EA20}" type="datetimeFigureOut">
               <a:rPr lang="en-US" smtClean="0"/>
-              <a:t>12/17/2025</a:t>
+              <a:t>1/18/2026</a:t>
             </a:fld>
             <a:endParaRPr lang="en-US"/>
           </a:p>
@@ -3738,7 +3738,7 @@
           <a:p>
             <a:fld id="{1B31CA29-C2EB-451B-A0BB-9B4644E6EA20}" type="datetimeFigureOut">
               <a:rPr lang="en-US" smtClean="0"/>
-              <a:t>12/17/2025</a:t>
+              <a:t>1/18/2026</a:t>
             </a:fld>
             <a:endParaRPr lang="en-US"/>
           </a:p>
@@ -8822,8 +8822,8 @@
         </p:nvSpPr>
         <p:spPr>
           <a:xfrm>
-            <a:off x="3074504" y="743346"/>
-            <a:ext cx="498310" cy="5577941"/>
+            <a:off x="3074504" y="743347"/>
+            <a:ext cx="498310" cy="3525418"/>
           </a:xfrm>
           <a:prstGeom prst="downArrow">
             <a:avLst/>
@@ -9029,10 +9029,10 @@
       </p:sp>
       <p:sp>
         <p:nvSpPr>
-          <p:cNvPr id="7" name="TextBox 6">
-            <a:extLst>
-              <a:ext uri="{FF2B5EF4-FFF2-40B4-BE49-F238E27FC236}">
-                <a16:creationId xmlns:a16="http://schemas.microsoft.com/office/drawing/2014/main" id="{1B1CC7A1-A5A7-CD4E-180D-865528E30062}"/>
+          <p:cNvPr id="20" name="TextBox 19">
+            <a:extLst>
+              <a:ext uri="{FF2B5EF4-FFF2-40B4-BE49-F238E27FC236}">
+                <a16:creationId xmlns:a16="http://schemas.microsoft.com/office/drawing/2014/main" id="{C58D6C3B-81FA-8FB2-2A93-BEBB0BD92F25}"/>
               </a:ext>
             </a:extLst>
           </p:cNvPr>
@@ -9041,8 +9041,54 @@
         </p:nvSpPr>
         <p:spPr>
           <a:xfrm>
-            <a:off x="6627194" y="2967335"/>
-            <a:ext cx="2155462" cy="923330"/>
+            <a:off x="1019772" y="1986781"/>
+            <a:ext cx="3662862" cy="584775"/>
+          </a:xfrm>
+          <a:prstGeom prst="rect">
+            <a:avLst/>
+          </a:prstGeom>
+          <a:solidFill>
+            <a:schemeClr val="bg2">
+              <a:lumMod val="90000"/>
+            </a:schemeClr>
+          </a:solidFill>
+        </p:spPr>
+        <p:txBody>
+          <a:bodyPr wrap="none" rtlCol="0">
+            <a:spAutoFit/>
+          </a:bodyPr>
+          <a:lstStyle/>
+          <a:p>
+            <a:r>
+              <a:rPr lang="en-US" b="1" dirty="0" err="1"/>
+              <a:t>events_parsed.parquet</a:t>
+            </a:r>
+            <a:endParaRPr lang="en-US" b="1" dirty="0"/>
+          </a:p>
+          <a:p>
+            <a:r>
+              <a:rPr lang="en-US" sz="1400" dirty="0"/>
+              <a:t>events with disease and treatments assigned</a:t>
+            </a:r>
+          </a:p>
+        </p:txBody>
+      </p:sp>
+      <p:sp>
+        <p:nvSpPr>
+          <p:cNvPr id="3" name="TextBox 2">
+            <a:extLst>
+              <a:ext uri="{FF2B5EF4-FFF2-40B4-BE49-F238E27FC236}">
+                <a16:creationId xmlns:a16="http://schemas.microsoft.com/office/drawing/2014/main" id="{6AD85BE5-C1FD-9643-CA73-3E1D9A15ADB9}"/>
+              </a:ext>
+            </a:extLst>
+          </p:cNvPr>
+          <p:cNvSpPr txBox="1"/>
+          <p:nvPr/>
+        </p:nvSpPr>
+        <p:spPr>
+          <a:xfrm>
+            <a:off x="6096000" y="202628"/>
+            <a:ext cx="1797223" cy="646331"/>
           </a:xfrm>
           <a:prstGeom prst="rect">
             <a:avLst/>
@@ -9063,85 +9109,75 @@
           </a:bodyPr>
           <a:lstStyle/>
           <a:p>
-            <a:endParaRPr lang="en-US" dirty="0"/>
-          </a:p>
-          <a:p>
-            <a:endParaRPr lang="en-US" dirty="0"/>
-          </a:p>
-          <a:p>
             <a:r>
               <a:rPr lang="en-US" dirty="0"/>
-              <a:t>Under development</a:t>
-            </a:r>
-          </a:p>
-        </p:txBody>
-      </p:sp>
-      <p:sp>
-        <p:nvSpPr>
-          <p:cNvPr id="20" name="TextBox 19">
-            <a:extLst>
-              <a:ext uri="{FF2B5EF4-FFF2-40B4-BE49-F238E27FC236}">
-                <a16:creationId xmlns:a16="http://schemas.microsoft.com/office/drawing/2014/main" id="{C58D6C3B-81FA-8FB2-2A93-BEBB0BD92F25}"/>
-              </a:ext>
-            </a:extLst>
-          </p:cNvPr>
-          <p:cNvSpPr txBox="1"/>
-          <p:nvPr/>
-        </p:nvSpPr>
-        <p:spPr>
-          <a:xfrm>
-            <a:off x="1019772" y="1986781"/>
-            <a:ext cx="3662862" cy="584775"/>
+              <a:t>Set up</a:t>
+            </a:r>
+          </a:p>
+          <a:p>
+            <a:r>
+              <a:rPr lang="en-US" dirty="0"/>
+              <a:t>Set time interval</a:t>
+            </a:r>
+          </a:p>
+        </p:txBody>
+      </p:sp>
+      <p:pic>
+        <p:nvPicPr>
+          <p:cNvPr id="5" name="Picture 4">
+            <a:extLst>
+              <a:ext uri="{FF2B5EF4-FFF2-40B4-BE49-F238E27FC236}">
+                <a16:creationId xmlns:a16="http://schemas.microsoft.com/office/drawing/2014/main" id="{9AD90CA9-55CC-2547-0B6A-4BD694D16FC3}"/>
+              </a:ext>
+            </a:extLst>
+          </p:cNvPr>
+          <p:cNvPicPr>
+            <a:picLocks noChangeAspect="1"/>
+          </p:cNvPicPr>
+          <p:nvPr/>
+        </p:nvPicPr>
+        <p:blipFill>
+          <a:blip r:embed="rId3"/>
+          <a:stretch>
+            <a:fillRect/>
+          </a:stretch>
+        </p:blipFill>
+        <p:spPr>
+          <a:xfrm>
+            <a:off x="6168506" y="525793"/>
+            <a:ext cx="5602858" cy="1546917"/>
           </a:xfrm>
           <a:prstGeom prst="rect">
             <a:avLst/>
           </a:prstGeom>
+        </p:spPr>
+      </p:pic>
+      <p:sp>
+        <p:nvSpPr>
+          <p:cNvPr id="8" name="Rectangle 7">
+            <a:extLst>
+              <a:ext uri="{FF2B5EF4-FFF2-40B4-BE49-F238E27FC236}">
+                <a16:creationId xmlns:a16="http://schemas.microsoft.com/office/drawing/2014/main" id="{F8B84C3F-4AFC-E67F-37DF-86F60751F2A0}"/>
+              </a:ext>
+            </a:extLst>
+          </p:cNvPr>
+          <p:cNvSpPr/>
+          <p:nvPr/>
+        </p:nvSpPr>
+        <p:spPr>
+          <a:xfrm>
+            <a:off x="190757" y="4268764"/>
+            <a:ext cx="4771912" cy="2485642"/>
+          </a:xfrm>
+          <a:prstGeom prst="rect">
+            <a:avLst/>
+          </a:prstGeom>
           <a:solidFill>
-            <a:schemeClr val="bg2">
-              <a:lumMod val="90000"/>
+            <a:schemeClr val="accent3">
+              <a:lumMod val="20000"/>
+              <a:lumOff val="80000"/>
             </a:schemeClr>
           </a:solidFill>
-        </p:spPr>
-        <p:txBody>
-          <a:bodyPr wrap="none" rtlCol="0">
-            <a:spAutoFit/>
-          </a:bodyPr>
-          <a:lstStyle/>
-          <a:p>
-            <a:r>
-              <a:rPr lang="en-US" b="1" dirty="0" err="1"/>
-              <a:t>events_parsed.parquet</a:t>
-            </a:r>
-            <a:endParaRPr lang="en-US" b="1" dirty="0"/>
-          </a:p>
-          <a:p>
-            <a:r>
-              <a:rPr lang="en-US" sz="1400" dirty="0"/>
-              <a:t>events with disease and treatments assigned</a:t>
-            </a:r>
-          </a:p>
-        </p:txBody>
-      </p:sp>
-      <p:sp>
-        <p:nvSpPr>
-          <p:cNvPr id="6" name="Oval 5">
-            <a:extLst>
-              <a:ext uri="{FF2B5EF4-FFF2-40B4-BE49-F238E27FC236}">
-                <a16:creationId xmlns:a16="http://schemas.microsoft.com/office/drawing/2014/main" id="{87F3B510-1A37-4D82-3F52-4D8502540F9B}"/>
-              </a:ext>
-            </a:extLst>
-          </p:cNvPr>
-          <p:cNvSpPr/>
-          <p:nvPr/>
-        </p:nvSpPr>
-        <p:spPr>
-          <a:xfrm>
-            <a:off x="2050985" y="2825843"/>
-            <a:ext cx="5263297" cy="689788"/>
-          </a:xfrm>
-          <a:prstGeom prst="ellipse">
-            <a:avLst/>
-          </a:prstGeom>
         </p:spPr>
         <p:style>
           <a:lnRef idx="2">
@@ -9160,23 +9196,43 @@
           </a:fontRef>
         </p:style>
         <p:txBody>
-          <a:bodyPr rtlCol="0" anchor="ctr"/>
+          <a:bodyPr rtlCol="0" anchor="t"/>
           <a:lstStyle/>
           <a:p>
             <a:pPr algn="ctr"/>
             <a:r>
-              <a:rPr lang="en-US" dirty="0"/>
-              <a:t>step3_create_denominators</a:t>
-            </a:r>
-          </a:p>
-        </p:txBody>
-      </p:sp>
-      <p:sp>
-        <p:nvSpPr>
-          <p:cNvPr id="2" name="TextBox 1">
-            <a:extLst>
-              <a:ext uri="{FF2B5EF4-FFF2-40B4-BE49-F238E27FC236}">
-                <a16:creationId xmlns:a16="http://schemas.microsoft.com/office/drawing/2014/main" id="{A903E4F5-3A60-0786-4116-3436523657D0}"/>
+              <a:rPr lang="en-US" dirty="0">
+                <a:solidFill>
+                  <a:schemeClr val="tx1"/>
+                </a:solidFill>
+              </a:rPr>
+              <a:t>data/</a:t>
+            </a:r>
+            <a:r>
+              <a:rPr lang="en-US" dirty="0" err="1">
+                <a:solidFill>
+                  <a:schemeClr val="tx1"/>
+                </a:solidFill>
+              </a:rPr>
+              <a:t>intermediate_files</a:t>
+            </a:r>
+            <a:r>
+              <a:rPr lang="en-US" dirty="0">
+                <a:solidFill>
+                  <a:schemeClr val="tx1"/>
+                </a:solidFill>
+              </a:rPr>
+              <a:t>/</a:t>
+            </a:r>
+          </a:p>
+        </p:txBody>
+      </p:sp>
+      <p:sp>
+        <p:nvSpPr>
+          <p:cNvPr id="9" name="TextBox 8">
+            <a:extLst>
+              <a:ext uri="{FF2B5EF4-FFF2-40B4-BE49-F238E27FC236}">
+                <a16:creationId xmlns:a16="http://schemas.microsoft.com/office/drawing/2014/main" id="{F49DC1DC-908B-D790-BFA0-14E05C45A9DE}"/>
               </a:ext>
             </a:extLst>
           </p:cNvPr>
@@ -9185,13 +9241,17 @@
         </p:nvSpPr>
         <p:spPr>
           <a:xfrm>
-            <a:off x="5943601" y="4173166"/>
-            <a:ext cx="4684167" cy="923330"/>
+            <a:off x="329321" y="4910687"/>
+            <a:ext cx="4418454" cy="492443"/>
           </a:xfrm>
           <a:prstGeom prst="rect">
             <a:avLst/>
           </a:prstGeom>
-          <a:noFill/>
+          <a:solidFill>
+            <a:schemeClr val="bg2">
+              <a:lumMod val="90000"/>
+            </a:schemeClr>
+          </a:solidFill>
         </p:spPr>
         <p:txBody>
           <a:bodyPr wrap="none" rtlCol="0">
@@ -9200,20 +9260,225 @@
           <a:lstStyle/>
           <a:p>
             <a:r>
+              <a:rPr lang="en-US" sz="1400" b="1" dirty="0"/>
+              <a:t>denominator_by_lact_group_time_period30.parquet</a:t>
+            </a:r>
+          </a:p>
+          <a:p>
+            <a:r>
+              <a:rPr lang="en-US" sz="1100" dirty="0"/>
+              <a:t>Each row is a unique animal</a:t>
+            </a:r>
+          </a:p>
+        </p:txBody>
+      </p:sp>
+      <p:sp>
+        <p:nvSpPr>
+          <p:cNvPr id="12" name="TextBox 11">
+            <a:extLst>
+              <a:ext uri="{FF2B5EF4-FFF2-40B4-BE49-F238E27FC236}">
+                <a16:creationId xmlns:a16="http://schemas.microsoft.com/office/drawing/2014/main" id="{9322E40B-F052-DF9F-648B-E5F2D283220E}"/>
+              </a:ext>
+            </a:extLst>
+          </p:cNvPr>
+          <p:cNvSpPr txBox="1"/>
+          <p:nvPr/>
+        </p:nvSpPr>
+        <p:spPr>
+          <a:xfrm>
+            <a:off x="315649" y="6162929"/>
+            <a:ext cx="4083939" cy="492443"/>
+          </a:xfrm>
+          <a:prstGeom prst="rect">
+            <a:avLst/>
+          </a:prstGeom>
+          <a:solidFill>
+            <a:schemeClr val="bg2">
+              <a:lumMod val="90000"/>
+            </a:schemeClr>
+          </a:solidFill>
+        </p:spPr>
+        <p:txBody>
+          <a:bodyPr wrap="none" rtlCol="0">
+            <a:spAutoFit/>
+          </a:bodyPr>
+          <a:lstStyle/>
+          <a:p>
+            <a:r>
+              <a:rPr lang="en-US" sz="1400" b="1" dirty="0" err="1"/>
+              <a:t>denominator_by_calendar_time_period.parquet</a:t>
+            </a:r>
+            <a:endParaRPr lang="en-US" sz="1400" b="1" dirty="0"/>
+          </a:p>
+          <a:p>
+            <a:r>
+              <a:rPr lang="en-US" sz="1100" dirty="0"/>
+              <a:t>Each row is a unique animal</a:t>
+            </a:r>
+          </a:p>
+        </p:txBody>
+      </p:sp>
+      <p:sp>
+        <p:nvSpPr>
+          <p:cNvPr id="14" name="TextBox 13">
+            <a:extLst>
+              <a:ext uri="{FF2B5EF4-FFF2-40B4-BE49-F238E27FC236}">
+                <a16:creationId xmlns:a16="http://schemas.microsoft.com/office/drawing/2014/main" id="{5C8DBADA-3A37-FD9B-D9BD-436A0EE44B21}"/>
+              </a:ext>
+            </a:extLst>
+          </p:cNvPr>
+          <p:cNvSpPr txBox="1"/>
+          <p:nvPr/>
+        </p:nvSpPr>
+        <p:spPr>
+          <a:xfrm>
+            <a:off x="329321" y="5537502"/>
+            <a:ext cx="4514634" cy="492443"/>
+          </a:xfrm>
+          <a:prstGeom prst="rect">
+            <a:avLst/>
+          </a:prstGeom>
+          <a:solidFill>
+            <a:schemeClr val="bg2">
+              <a:lumMod val="90000"/>
+            </a:schemeClr>
+          </a:solidFill>
+        </p:spPr>
+        <p:txBody>
+          <a:bodyPr wrap="none" rtlCol="0">
+            <a:spAutoFit/>
+          </a:bodyPr>
+          <a:lstStyle/>
+          <a:p>
+            <a:r>
+              <a:rPr lang="en-US" sz="1400" b="1" dirty="0"/>
+              <a:t>denominator_by_lact_group_time_period365.parquet</a:t>
+            </a:r>
+          </a:p>
+          <a:p>
+            <a:r>
+              <a:rPr lang="en-US" sz="1100" dirty="0"/>
+              <a:t>Each row is a unique animal</a:t>
+            </a:r>
+          </a:p>
+        </p:txBody>
+      </p:sp>
+      <p:sp>
+        <p:nvSpPr>
+          <p:cNvPr id="7" name="TextBox 6">
+            <a:extLst>
+              <a:ext uri="{FF2B5EF4-FFF2-40B4-BE49-F238E27FC236}">
+                <a16:creationId xmlns:a16="http://schemas.microsoft.com/office/drawing/2014/main" id="{1B1CC7A1-A5A7-CD4E-180D-865528E30062}"/>
+              </a:ext>
+            </a:extLst>
+          </p:cNvPr>
+          <p:cNvSpPr txBox="1"/>
+          <p:nvPr/>
+        </p:nvSpPr>
+        <p:spPr>
+          <a:xfrm>
+            <a:off x="4035953" y="3051054"/>
+            <a:ext cx="7987508" cy="1477328"/>
+          </a:xfrm>
+          <a:prstGeom prst="rect">
+            <a:avLst/>
+          </a:prstGeom>
+          <a:solidFill>
+            <a:schemeClr val="bg1"/>
+          </a:solidFill>
+          <a:ln>
+            <a:solidFill>
+              <a:schemeClr val="tx1">
+                <a:lumMod val="75000"/>
+                <a:lumOff val="25000"/>
+              </a:schemeClr>
+            </a:solidFill>
+          </a:ln>
+        </p:spPr>
+        <p:txBody>
+          <a:bodyPr wrap="none" rtlCol="0">
+            <a:spAutoFit/>
+          </a:bodyPr>
+          <a:lstStyle/>
+          <a:p>
+            <a:endParaRPr lang="en-US" dirty="0"/>
+          </a:p>
+          <a:p>
+            <a:endParaRPr lang="en-US" dirty="0"/>
+          </a:p>
+          <a:p>
+            <a:r>
               <a:rPr lang="en-US" dirty="0"/>
-              <a:t>Step 1 – set interval (as days) between counts</a:t>
-            </a:r>
-          </a:p>
-          <a:p>
+              <a:t>Time periods will be created for each “</a:t>
+            </a:r>
+            <a:r>
+              <a:rPr lang="en-US" dirty="0" err="1"/>
+              <a:t>denominator_time_period</a:t>
+            </a:r>
             <a:r>
               <a:rPr lang="en-US" dirty="0"/>
-              <a:t>Step 2 – create logic for eligibility</a:t>
+              <a:t>” set on line 56</a:t>
             </a:r>
           </a:p>
           <a:p>
             <a:r>
               <a:rPr lang="en-US" dirty="0"/>
-              <a:t>Step 3 – run denominators</a:t>
+              <a:t>Day of phase parameters will be set based on lines 63-65</a:t>
+            </a:r>
+          </a:p>
+          <a:p>
+            <a:r>
+              <a:rPr lang="en-US" dirty="0"/>
+              <a:t>The process of creating denominators can be viewed in the report section</a:t>
+            </a:r>
+          </a:p>
+        </p:txBody>
+      </p:sp>
+      <p:sp>
+        <p:nvSpPr>
+          <p:cNvPr id="6" name="Oval 5">
+            <a:extLst>
+              <a:ext uri="{FF2B5EF4-FFF2-40B4-BE49-F238E27FC236}">
+                <a16:creationId xmlns:a16="http://schemas.microsoft.com/office/drawing/2014/main" id="{87F3B510-1A37-4D82-3F52-4D8502540F9B}"/>
+              </a:ext>
+            </a:extLst>
+          </p:cNvPr>
+          <p:cNvSpPr/>
+          <p:nvPr/>
+        </p:nvSpPr>
+        <p:spPr>
+          <a:xfrm>
+            <a:off x="2050985" y="2825843"/>
+            <a:ext cx="5263297" cy="689788"/>
+          </a:xfrm>
+          <a:prstGeom prst="ellipse">
+            <a:avLst/>
+          </a:prstGeom>
+        </p:spPr>
+        <p:style>
+          <a:lnRef idx="2">
+            <a:schemeClr val="accent1">
+              <a:shade val="15000"/>
+            </a:schemeClr>
+          </a:lnRef>
+          <a:fillRef idx="1">
+            <a:schemeClr val="accent1"/>
+          </a:fillRef>
+          <a:effectRef idx="0">
+            <a:schemeClr val="accent1"/>
+          </a:effectRef>
+          <a:fontRef idx="minor">
+            <a:schemeClr val="lt1"/>
+          </a:fontRef>
+        </p:style>
+        <p:txBody>
+          <a:bodyPr rtlCol="0" anchor="ctr"/>
+          <a:lstStyle/>
+          <a:p>
+            <a:pPr algn="ctr"/>
+            <a:r>
+              <a:rPr lang="en-US" dirty="0"/>
+              <a:t>step3_create_denominators</a:t>
             </a:r>
           </a:p>
         </p:txBody>
